--- a/MECH191_metallurgy/slideDecks/pptx/MECH191_Week5_Lecture.pptx
+++ b/MECH191_metallurgy/slideDecks/pptx/MECH191_Week5_Lecture.pptx
@@ -22419,7 +22419,7 @@
         </p:spPr>
         <p:txBody>
           <a:bodyPr wrap="none" lIns="0" rIns="0" tIns="0" bIns="0">
-            <a:spAutoFit/>
+            <a:noAutofit/>
           </a:bodyPr>
           <a:lstStyle/>
           <a:p>
@@ -22430,7 +22430,7 @@
                 </a:solidFill>
                 <a:latin typeface="Calibri"/>
               </a:rPr>
-              <a:t>Metallography Lab — Module 4</a:t>
+              <a:t>Alloy Research Portfolio — Module 4</a:t>
             </a:r>
           </a:p>
         </p:txBody>
@@ -22453,7 +22453,7 @@
         </p:spPr>
         <p:txBody>
           <a:bodyPr wrap="none" lIns="0" rIns="0" tIns="0" bIns="0">
-            <a:spAutoFit/>
+            <a:noAutofit/>
           </a:bodyPr>
           <a:lstStyle/>
           <a:p>
@@ -22464,7 +22464,7 @@
                 </a:solidFill>
                 <a:latin typeface="Calibri"/>
               </a:rPr>
-              <a:t>EXAMET-5-R-600-HD  ·  50–500×</a:t>
+              <a:t>No Microscope Required</a:t>
             </a:r>
           </a:p>
         </p:txBody>
@@ -22589,7 +22589,7 @@
         </p:spPr>
         <p:txBody>
           <a:bodyPr wrap="none" lIns="0" rIns="0" tIns="0" bIns="0">
-            <a:spAutoFit/>
+            <a:noAutofit/>
           </a:bodyPr>
           <a:lstStyle/>
           <a:p>
@@ -22600,7 +22600,7 @@
                 </a:solidFill>
                 <a:latin typeface="Calibri"/>
               </a:rPr>
-              <a:t>Compare austenitic twins in D &amp; E. Find the martensitic, precipitate-</a:t>
+              <a:t>Research 304, 316, and 17-4PH stainless: composition, PREN, and why</a:t>
             </a:r>
           </a:p>
         </p:txBody>
@@ -22623,7 +22623,7 @@
         </p:spPr>
         <p:txBody>
           <a:bodyPr wrap="none" lIns="0" rIns="0" tIns="0" bIns="0">
-            <a:spAutoFit/>
+            <a:noAutofit/>
           </a:bodyPr>
           <a:lstStyle/>
           <a:p>
@@ -22634,7 +22634,7 @@
                 </a:solidFill>
                 <a:latin typeface="Calibri"/>
               </a:rPr>
-              <a:t>hardened structure in F.</a:t>
+              <a:t>17-4PH is precipitation-hardened rather than austenitic.</a:t>
             </a:r>
           </a:p>
         </p:txBody>
@@ -22691,7 +22691,7 @@
         </p:spPr>
         <p:txBody>
           <a:bodyPr wrap="none" lIns="0" rIns="0" tIns="0" bIns="0">
-            <a:spAutoFit/>
+            <a:noAutofit/>
           </a:bodyPr>
           <a:lstStyle/>
           <a:p>
@@ -22702,7 +22702,7 @@
                 </a:solidFill>
                 <a:latin typeface="Calibri"/>
               </a:rPr>
-              <a:t>1  Observe — complete feature table</a:t>
+              <a:t>1  Research — record data &amp; sources</a:t>
             </a:r>
           </a:p>
         </p:txBody>
@@ -22725,7 +22725,7 @@
         </p:spPr>
         <p:txBody>
           <a:bodyPr wrap="none" lIns="0" rIns="0" tIns="0" bIns="0">
-            <a:spAutoFit/>
+            <a:noAutofit/>
           </a:bodyPr>
           <a:lstStyle/>
           <a:p>
@@ -22736,7 +22736,7 @@
                 </a:solidFill>
                 <a:latin typeface="Calibri"/>
               </a:rPr>
-              <a:t>2  Sketch — label magnification &amp; specimen</a:t>
+              <a:t>2  Answer — short-answer questions</a:t>
             </a:r>
           </a:p>
         </p:txBody>
@@ -22759,7 +22759,7 @@
         </p:spPr>
         <p:txBody>
           <a:bodyPr wrap="none" lIns="0" rIns="0" tIns="0" bIns="0">
-            <a:spAutoFit/>
+            <a:noAutofit/>
           </a:bodyPr>
           <a:lstStyle/>
           <a:p>
@@ -22770,7 +22770,7 @@
                 </a:solidFill>
                 <a:latin typeface="Calibri"/>
               </a:rPr>
-              <a:t>3  Answer — 4 short questions</a:t>
+              <a:t>3  Apply — critical-thinking &amp; equations</a:t>
             </a:r>
           </a:p>
         </p:txBody>
@@ -22793,7 +22793,7 @@
         </p:spPr>
         <p:txBody>
           <a:bodyPr wrap="none" lIns="0" rIns="0" tIns="0" bIns="0">
-            <a:spAutoFit/>
+            <a:noAutofit/>
           </a:bodyPr>
           <a:lstStyle/>
           <a:p>
@@ -22804,7 +22804,7 @@
                 </a:solidFill>
                 <a:latin typeface="Calibri"/>
               </a:rPr>
-              <a:t>Specimens to Check Out</a:t>
+              <a:t>Alloys of Record</a:t>
             </a:r>
           </a:p>
         </p:txBody>
@@ -22827,7 +22827,7 @@
         </p:spPr>
         <p:txBody>
           <a:bodyPr wrap="none" lIns="0" rIns="0" tIns="0" bIns="0">
-            <a:spAutoFit/>
+            <a:noAutofit/>
           </a:bodyPr>
           <a:lstStyle/>
           <a:p>
@@ -22838,7 +22838,7 @@
                 </a:solidFill>
                 <a:latin typeface="Calibri"/>
               </a:rPr>
-              <a:t>· Specimen D — 304 stainless steel</a:t>
+              <a:t>· Alloy D — 304 stainless steel</a:t>
             </a:r>
           </a:p>
         </p:txBody>
@@ -22861,7 +22861,7 @@
         </p:spPr>
         <p:txBody>
           <a:bodyPr wrap="none" lIns="0" rIns="0" tIns="0" bIns="0">
-            <a:spAutoFit/>
+            <a:noAutofit/>
           </a:bodyPr>
           <a:lstStyle/>
           <a:p>
@@ -22872,7 +22872,7 @@
                 </a:solidFill>
                 <a:latin typeface="Calibri"/>
               </a:rPr>
-              <a:t>· Specimen E — 316 stainless steel</a:t>
+              <a:t>· Alloy E — 316 stainless steel</a:t>
             </a:r>
           </a:p>
         </p:txBody>
@@ -22895,7 +22895,7 @@
         </p:spPr>
         <p:txBody>
           <a:bodyPr wrap="none" lIns="0" rIns="0" tIns="0" bIns="0">
-            <a:spAutoFit/>
+            <a:noAutofit/>
           </a:bodyPr>
           <a:lstStyle/>
           <a:p>
@@ -22906,7 +22906,7 @@
                 </a:solidFill>
                 <a:latin typeface="Calibri"/>
               </a:rPr>
-              <a:t>· Specimen F — 17-4PH stainless steel</a:t>
+              <a:t>· Alloy F — 17-4PH stainless steel</a:t>
             </a:r>
           </a:p>
         </p:txBody>
@@ -22929,7 +22929,7 @@
         </p:spPr>
         <p:txBody>
           <a:bodyPr wrap="none" lIns="0" rIns="0" tIns="0" bIns="0">
-            <a:spAutoFit/>
+            <a:noAutofit/>
           </a:bodyPr>
           <a:lstStyle/>
           <a:p>
@@ -22940,7 +22940,7 @@
                 </a:solidFill>
                 <a:latin typeface="Calibri"/>
               </a:rPr>
-              <a:t>How to check out the kit:</a:t>
+              <a:t>How to Complete This Module:</a:t>
             </a:r>
           </a:p>
         </p:txBody>
@@ -22963,7 +22963,7 @@
         </p:spPr>
         <p:txBody>
           <a:bodyPr wrap="none" lIns="0" rIns="0" tIns="0" bIns="0">
-            <a:spAutoFit/>
+            <a:noAutofit/>
           </a:bodyPr>
           <a:lstStyle/>
           <a:p>
@@ -22974,7 +22974,7 @@
                 </a:solidFill>
                 <a:latin typeface="Calibri"/>
               </a:rPr>
-              <a:t>1  See instructor after class today</a:t>
+              <a:t>1  Research the alloy(s) using credible sources</a:t>
             </a:r>
           </a:p>
         </p:txBody>
@@ -22997,7 +22997,7 @@
         </p:spPr>
         <p:txBody>
           <a:bodyPr wrap="none" lIns="0" rIns="0" tIns="0" bIns="0">
-            <a:spAutoFit/>
+            <a:noAutofit/>
           </a:bodyPr>
           <a:lstStyle/>
           <a:p>
@@ -23008,7 +23008,7 @@
                 </a:solidFill>
                 <a:latin typeface="Calibri"/>
               </a:rPr>
-              <a:t>2  Sign out the specimen tray</a:t>
+              <a:t>2  Record data with a source citation</a:t>
             </a:r>
           </a:p>
         </p:txBody>
@@ -23031,7 +23031,7 @@
         </p:spPr>
         <p:txBody>
           <a:bodyPr wrap="none" lIns="0" rIns="0" tIns="0" bIns="0">
-            <a:spAutoFit/>
+            <a:noAutofit/>
           </a:bodyPr>
           <a:lstStyle/>
           <a:p>
@@ -23042,7 +23042,7 @@
                 </a:solidFill>
                 <a:latin typeface="Calibri"/>
               </a:rPr>
-              <a:t>3  Use the EXAMET-5 at your convenience</a:t>
+              <a:t>3  Answer the short-answer questions</a:t>
             </a:r>
           </a:p>
         </p:txBody>
@@ -23065,7 +23065,7 @@
         </p:spPr>
         <p:txBody>
           <a:bodyPr wrap="none" lIns="0" rIns="0" tIns="0" bIns="0">
-            <a:spAutoFit/>
+            <a:noAutofit/>
           </a:bodyPr>
           <a:lstStyle/>
           <a:p>
@@ -23076,7 +23076,7 @@
                 </a:solidFill>
                 <a:latin typeface="Calibri"/>
               </a:rPr>
-              <a:t>4  Return kit before leaving class</a:t>
+              <a:t>4  Answer the critical-thinking questions</a:t>
             </a:r>
           </a:p>
         </p:txBody>
@@ -23099,7 +23099,7 @@
         </p:spPr>
         <p:txBody>
           <a:bodyPr wrap="none" lIns="0" rIns="0" tIns="0" bIns="0">
-            <a:spAutoFit/>
+            <a:noAutofit/>
           </a:bodyPr>
           <a:lstStyle/>
           <a:p>
@@ -23110,7 +23110,7 @@
                 </a:solidFill>
                 <a:latin typeface="Calibri"/>
               </a:rPr>
-              <a:t>5  Submit completed module with your portfolio</a:t>
+              <a:t>5  Keep the module with your portfolio</a:t>
             </a:r>
           </a:p>
         </p:txBody>
